--- a/builder/assets/reference-pages/radar-capability.pptx
+++ b/builder/assets/reference-pages/radar-capability.pptx
@@ -1097,7 +1097,7 @@
                   <a:srgbClr val="15375F"/>
                 </a:solidFill>
               </a:rPr>
-              <a:t>九项能力中四项落后标杆 2 档以上，治理、数据、平台与变革需优先补齐</a:t>
+              <a:t>Four out of nine competencies lag behind the benchmark 2 Above the level, governance, data, platform and change need to be completed as a priority</a:t>
             </a:r>
           </a:p>
         </p:txBody>
@@ -1961,7 +1961,7 @@
                   <a:srgbClr val="172033"/>
                 </a:solidFill>
               </a:rPr>
-              <a:t>战略清晰度</a:t>
+              <a:t>strategic clarity</a:t>
             </a:r>
           </a:p>
           <a:p xmlns:a="http://schemas.openxmlformats.org/drawingml/2006/main">
@@ -1995,7 +1995,7 @@
                   <a:srgbClr val="172033"/>
                 </a:solidFill>
               </a:rPr>
-              <a:t>战略方向未充分量化</a:t>
+              <a:t>Strategic direction is not fully quantified</a:t>
             </a:r>
           </a:p>
         </p:txBody>
@@ -2080,7 +2080,7 @@
                   <a:srgbClr val="172033"/>
                 </a:solidFill>
               </a:rPr>
-              <a:t>组织架构</a:t>
+              <a:t>Organizational structure</a:t>
             </a:r>
           </a:p>
           <a:p xmlns:a="http://schemas.openxmlformats.org/drawingml/2006/main">
@@ -2114,7 +2114,7 @@
                   <a:srgbClr val="172033"/>
                 </a:solidFill>
               </a:rPr>
-              <a:t>职责边界仍有重叠</a:t>
+              <a:t>Boundaries of responsibility still overlap</a:t>
             </a:r>
           </a:p>
         </p:txBody>
@@ -2199,7 +2199,7 @@
                   <a:srgbClr val="E8872D"/>
                 </a:solidFill>
               </a:rPr>
-              <a:t>★ 治理机制</a:t>
+              <a:t>★ governance mechanism</a:t>
             </a:r>
           </a:p>
           <a:p xmlns:a="http://schemas.openxmlformats.org/drawingml/2006/main">
@@ -2233,7 +2233,7 @@
                   <a:srgbClr val="E8872D"/>
                 </a:solidFill>
               </a:rPr>
-              <a:t>跨部门决策机制缺失</a:t>
+              <a:t>Lack of cross-departmental decision-making mechanism</a:t>
             </a:r>
           </a:p>
         </p:txBody>
@@ -2318,7 +2318,7 @@
                   <a:srgbClr val="172033"/>
                 </a:solidFill>
               </a:rPr>
-              <a:t>流程标准化</a:t>
+              <a:t>process standardization</a:t>
             </a:r>
           </a:p>
           <a:p xmlns:a="http://schemas.openxmlformats.org/drawingml/2006/main">
@@ -2352,7 +2352,7 @@
                   <a:srgbClr val="172033"/>
                 </a:solidFill>
               </a:rPr>
-              <a:t>关键流程口径不一</a:t>
+              <a:t>Key processes have different calibers</a:t>
             </a:r>
           </a:p>
         </p:txBody>
@@ -2437,7 +2437,7 @@
                   <a:srgbClr val="E8872D"/>
                 </a:solidFill>
               </a:rPr>
-              <a:t>★ 数据基础</a:t>
+              <a:t>★ Data base</a:t>
             </a:r>
           </a:p>
           <a:p xmlns:a="http://schemas.openxmlformats.org/drawingml/2006/main">
@@ -2471,7 +2471,7 @@
                   <a:srgbClr val="E8872D"/>
                 </a:solidFill>
               </a:rPr>
-              <a:t>主数据尚未统一</a:t>
+              <a:t>Master data has not yet been unified</a:t>
             </a:r>
           </a:p>
         </p:txBody>
@@ -2556,7 +2556,7 @@
                   <a:srgbClr val="E8872D"/>
                 </a:solidFill>
               </a:rPr>
-              <a:t>★ 工具平台</a:t>
+              <a:t>★ Tool platform</a:t>
             </a:r>
           </a:p>
           <a:p xmlns:a="http://schemas.openxmlformats.org/drawingml/2006/main">
@@ -2590,7 +2590,7 @@
                   <a:srgbClr val="E8872D"/>
                 </a:solidFill>
               </a:rPr>
-              <a:t>系统接口重复建设</a:t>
+              <a:t>System interface duplication construction</a:t>
             </a:r>
           </a:p>
         </p:txBody>
@@ -2675,7 +2675,7 @@
                   <a:srgbClr val="172033"/>
                 </a:solidFill>
               </a:rPr>
-              <a:t>人才结构</a:t>
+              <a:t>Talent structure</a:t>
             </a:r>
           </a:p>
           <a:p xmlns:a="http://schemas.openxmlformats.org/drawingml/2006/main">
@@ -2709,7 +2709,7 @@
                   <a:srgbClr val="172033"/>
                 </a:solidFill>
               </a:rPr>
-              <a:t>关键岗位供给偏紧</a:t>
+              <a:t>The supply of key positions is tight</a:t>
             </a:r>
           </a:p>
         </p:txBody>
@@ -2794,7 +2794,7 @@
                   <a:srgbClr val="172033"/>
                 </a:solidFill>
               </a:rPr>
-              <a:t>能力发展</a:t>
+              <a:t>Capability development</a:t>
             </a:r>
           </a:p>
           <a:p xmlns:a="http://schemas.openxmlformats.org/drawingml/2006/main">
@@ -2828,7 +2828,7 @@
                   <a:srgbClr val="172033"/>
                 </a:solidFill>
               </a:rPr>
-              <a:t>培养路径不够清楚</a:t>
+              <a:t>The training path is not clear enough</a:t>
             </a:r>
           </a:p>
         </p:txBody>
@@ -2913,7 +2913,7 @@
                   <a:srgbClr val="E8872D"/>
                 </a:solidFill>
               </a:rPr>
-              <a:t>★ 变革文化</a:t>
+              <a:t>★ Change culture</a:t>
             </a:r>
           </a:p>
           <a:p xmlns:a="http://schemas.openxmlformats.org/drawingml/2006/main">
@@ -2947,7 +2947,7 @@
                   <a:srgbClr val="E8872D"/>
                 </a:solidFill>
               </a:rPr>
-              <a:t>一线采用动力不足</a:t>
+              <a:t>Lack of motivation for front-line adoption</a:t>
             </a:r>
           </a:p>
         </p:txBody>
@@ -3038,7 +3038,7 @@
                   <a:srgbClr val="172033"/>
                 </a:solidFill>
               </a:rPr>
-              <a:t>战略与治理群</a:t>
+              <a:t>Strategy and Governance Group</a:t>
             </a:r>
           </a:p>
           <a:p xmlns:a="http://schemas.openxmlformats.org/drawingml/2006/main">
@@ -3055,7 +3055,7 @@
                   <a:srgbClr val="172033"/>
                 </a:solidFill>
               </a:rPr>
-              <a:t>均分 2.7</a:t>
+              <a:t>Divide equally 2.7</a:t>
             </a:r>
           </a:p>
           <a:p xmlns:a="http://schemas.openxmlformats.org/drawingml/2006/main">
@@ -3072,7 +3072,7 @@
                   <a:srgbClr val="172033"/>
                 </a:solidFill>
               </a:rPr>
-              <a:t>治理机制不完整</a:t>
+              <a:t>Incomplete governance mechanism</a:t>
             </a:r>
           </a:p>
           <a:p xmlns:a="http://schemas.openxmlformats.org/drawingml/2006/main">
@@ -3089,7 +3089,7 @@
                   <a:srgbClr val="172033"/>
                 </a:solidFill>
               </a:rPr>
-              <a:t>建立跨部门治理例会</a:t>
+              <a:t>Establish regular cross-department governance meetings</a:t>
             </a:r>
           </a:p>
         </p:txBody>
@@ -3145,7 +3145,7 @@
                   <a:srgbClr val="172033"/>
                 </a:solidFill>
               </a:rPr>
-              <a:t>运营与流程群</a:t>
+              <a:t>Operations and Process Group</a:t>
             </a:r>
           </a:p>
           <a:p xmlns:a="http://schemas.openxmlformats.org/drawingml/2006/main">
@@ -3162,7 +3162,7 @@
                   <a:srgbClr val="172033"/>
                 </a:solidFill>
               </a:rPr>
-              <a:t>均分 2.1</a:t>
+              <a:t>Divide equally 2.1</a:t>
             </a:r>
           </a:p>
           <a:p xmlns:a="http://schemas.openxmlformats.org/drawingml/2006/main">
@@ -3179,7 +3179,7 @@
                   <a:srgbClr val="172033"/>
                 </a:solidFill>
               </a:rPr>
-              <a:t>数据与平台基础薄弱</a:t>
+              <a:t>Weak data and platform foundation</a:t>
             </a:r>
           </a:p>
           <a:p xmlns:a="http://schemas.openxmlformats.org/drawingml/2006/main">
@@ -3196,7 +3196,7 @@
                   <a:srgbClr val="172033"/>
                 </a:solidFill>
               </a:rPr>
-              <a:t>统一主数据与接口</a:t>
+              <a:t>Unify master data and interfaces</a:t>
             </a:r>
           </a:p>
         </p:txBody>
@@ -3252,7 +3252,7 @@
                   <a:srgbClr val="172033"/>
                 </a:solidFill>
               </a:rPr>
-              <a:t>人才与文化群</a:t>
+              <a:t>Talent and Culture Group</a:t>
             </a:r>
           </a:p>
           <a:p xmlns:a="http://schemas.openxmlformats.org/drawingml/2006/main">
@@ -3269,7 +3269,7 @@
                   <a:srgbClr val="172033"/>
                 </a:solidFill>
               </a:rPr>
-              <a:t>均分 2.6</a:t>
+              <a:t>Divide equally 2.6</a:t>
             </a:r>
           </a:p>
           <a:p xmlns:a="http://schemas.openxmlformats.org/drawingml/2006/main">
@@ -3286,7 +3286,7 @@
                   <a:srgbClr val="172033"/>
                 </a:solidFill>
               </a:rPr>
-              <a:t>变革采用不足</a:t>
+              <a:t>Insufficient adoption of change</a:t>
             </a:r>
           </a:p>
           <a:p xmlns:a="http://schemas.openxmlformats.org/drawingml/2006/main">
@@ -3303,7 +3303,7 @@
                   <a:srgbClr val="172033"/>
                 </a:solidFill>
               </a:rPr>
-              <a:t>设置业务采用目标</a:t>
+              <a:t>Set business adoption goals</a:t>
             </a:r>
           </a:p>
         </p:txBody>
@@ -3359,7 +3359,7 @@
                   <a:srgbClr val="15375F"/>
                 </a:solidFill>
               </a:rPr>
-              <a:t>整体成熟度 2.5/5，12 个月目标 4.0/5</a:t>
+              <a:t>overall maturity 2.5/5,12 monthly goal 4.0/5</a:t>
             </a:r>
           </a:p>
         </p:txBody>
